--- a/docs/pptx/whole/jx-scatter-cg-epi-sex.pptx
+++ b/docs/pptx/whole/jx-scatter-cg-epi-sex.pptx
@@ -36084,7 +36084,1872 @@
         </p:sp>
         <p:sp>
           <p:nvSpPr>
-            <p:cNvPr id="966" name="tx966"/>
+            <p:cNvPr id="966" name="pg966"/>
+            <p:cNvSpPr/>
+            <p:nvPr/>
+          </p:nvSpPr>
+          <p:spPr>
+            <a:xfrm>
+              <a:off x="2171462" y="3250053"/>
+              <a:ext cx="6445748" cy="1616254"/>
+            </a:xfrm>
+            <a:custGeom>
+              <a:avLst/>
+              <a:pathLst>
+                <a:path w="6445748" h="1616254">
+                  <a:moveTo>
+                    <a:pt x="0" y="1541176"/>
+                  </a:moveTo>
+                  <a:lnTo>
+                    <a:pt x="160573" y="1505647"/>
+                  </a:lnTo>
+                  <a:lnTo>
+                    <a:pt x="321147" y="1470071"/>
+                  </a:lnTo>
+                  <a:lnTo>
+                    <a:pt x="481721" y="1434439"/>
+                  </a:lnTo>
+                  <a:lnTo>
+                    <a:pt x="642295" y="1398739"/>
+                  </a:lnTo>
+                  <a:lnTo>
+                    <a:pt x="802868" y="1362957"/>
+                  </a:lnTo>
+                  <a:lnTo>
+                    <a:pt x="963442" y="1327076"/>
+                  </a:lnTo>
+                  <a:lnTo>
+                    <a:pt x="1124016" y="1291074"/>
+                  </a:lnTo>
+                  <a:lnTo>
+                    <a:pt x="1284590" y="1254925"/>
+                  </a:lnTo>
+                  <a:lnTo>
+                    <a:pt x="1445164" y="1218599"/>
+                  </a:lnTo>
+                  <a:lnTo>
+                    <a:pt x="1605737" y="1182061"/>
+                  </a:lnTo>
+                  <a:lnTo>
+                    <a:pt x="1766311" y="1145277"/>
+                  </a:lnTo>
+                  <a:lnTo>
+                    <a:pt x="1926885" y="1108212"/>
+                  </a:lnTo>
+                  <a:lnTo>
+                    <a:pt x="2087459" y="1070843"/>
+                  </a:lnTo>
+                  <a:lnTo>
+                    <a:pt x="2248032" y="1033155"/>
+                  </a:lnTo>
+                  <a:lnTo>
+                    <a:pt x="2408606" y="995153"/>
+                  </a:lnTo>
+                  <a:lnTo>
+                    <a:pt x="2569180" y="956853"/>
+                  </a:lnTo>
+                  <a:lnTo>
+                    <a:pt x="2729754" y="918284"/>
+                  </a:lnTo>
+                  <a:lnTo>
+                    <a:pt x="2890328" y="879482"/>
+                  </a:lnTo>
+                  <a:lnTo>
+                    <a:pt x="3050901" y="840481"/>
+                  </a:lnTo>
+                  <a:lnTo>
+                    <a:pt x="3211475" y="801314"/>
+                  </a:lnTo>
+                  <a:lnTo>
+                    <a:pt x="3372049" y="762011"/>
+                  </a:lnTo>
+                  <a:lnTo>
+                    <a:pt x="3532623" y="722595"/>
+                  </a:lnTo>
+                  <a:lnTo>
+                    <a:pt x="3693197" y="683086"/>
+                  </a:lnTo>
+                  <a:lnTo>
+                    <a:pt x="3853770" y="643501"/>
+                  </a:lnTo>
+                  <a:lnTo>
+                    <a:pt x="4014344" y="603853"/>
+                  </a:lnTo>
+                  <a:lnTo>
+                    <a:pt x="4174918" y="564152"/>
+                  </a:lnTo>
+                  <a:lnTo>
+                    <a:pt x="4335492" y="524407"/>
+                  </a:lnTo>
+                  <a:lnTo>
+                    <a:pt x="4496065" y="484625"/>
+                  </a:lnTo>
+                  <a:lnTo>
+                    <a:pt x="4656639" y="444811"/>
+                  </a:lnTo>
+                  <a:lnTo>
+                    <a:pt x="4817213" y="404971"/>
+                  </a:lnTo>
+                  <a:lnTo>
+                    <a:pt x="4977787" y="365107"/>
+                  </a:lnTo>
+                  <a:lnTo>
+                    <a:pt x="5138361" y="325223"/>
+                  </a:lnTo>
+                  <a:lnTo>
+                    <a:pt x="5298934" y="285322"/>
+                  </a:lnTo>
+                  <a:lnTo>
+                    <a:pt x="5459508" y="245406"/>
+                  </a:lnTo>
+                  <a:lnTo>
+                    <a:pt x="5620082" y="205476"/>
+                  </a:lnTo>
+                  <a:lnTo>
+                    <a:pt x="5780656" y="165535"/>
+                  </a:lnTo>
+                  <a:lnTo>
+                    <a:pt x="5941230" y="125583"/>
+                  </a:lnTo>
+                  <a:lnTo>
+                    <a:pt x="6101803" y="85622"/>
+                  </a:lnTo>
+                  <a:lnTo>
+                    <a:pt x="6262377" y="45653"/>
+                  </a:lnTo>
+                  <a:lnTo>
+                    <a:pt x="6422951" y="5676"/>
+                  </a:lnTo>
+                  <a:lnTo>
+                    <a:pt x="6445748" y="0"/>
+                  </a:lnTo>
+                  <a:lnTo>
+                    <a:pt x="6445748" y="136390"/>
+                  </a:lnTo>
+                  <a:lnTo>
+                    <a:pt x="6422951" y="141398"/>
+                  </a:lnTo>
+                  <a:lnTo>
+                    <a:pt x="6262377" y="176680"/>
+                  </a:lnTo>
+                  <a:lnTo>
+                    <a:pt x="6101803" y="211970"/>
+                  </a:lnTo>
+                  <a:lnTo>
+                    <a:pt x="5941230" y="247267"/>
+                  </a:lnTo>
+                  <a:lnTo>
+                    <a:pt x="5780656" y="282575"/>
+                  </a:lnTo>
+                  <a:lnTo>
+                    <a:pt x="5620082" y="317892"/>
+                  </a:lnTo>
+                  <a:lnTo>
+                    <a:pt x="5459508" y="353221"/>
+                  </a:lnTo>
+                  <a:lnTo>
+                    <a:pt x="5298934" y="388564"/>
+                  </a:lnTo>
+                  <a:lnTo>
+                    <a:pt x="5138361" y="423922"/>
+                  </a:lnTo>
+                  <a:lnTo>
+                    <a:pt x="4977787" y="459297"/>
+                  </a:lnTo>
+                  <a:lnTo>
+                    <a:pt x="4817213" y="494692"/>
+                  </a:lnTo>
+                  <a:lnTo>
+                    <a:pt x="4656639" y="530111"/>
+                  </a:lnTo>
+                  <a:lnTo>
+                    <a:pt x="4496065" y="565556"/>
+                  </a:lnTo>
+                  <a:lnTo>
+                    <a:pt x="4335492" y="601033"/>
+                  </a:lnTo>
+                  <a:lnTo>
+                    <a:pt x="4174918" y="636547"/>
+                  </a:lnTo>
+                  <a:lnTo>
+                    <a:pt x="4014344" y="672105"/>
+                  </a:lnTo>
+                  <a:lnTo>
+                    <a:pt x="3853770" y="707715"/>
+                  </a:lnTo>
+                  <a:lnTo>
+                    <a:pt x="3693197" y="743389"/>
+                  </a:lnTo>
+                  <a:lnTo>
+                    <a:pt x="3532623" y="779139"/>
+                  </a:lnTo>
+                  <a:lnTo>
+                    <a:pt x="3372049" y="814982"/>
+                  </a:lnTo>
+                  <a:lnTo>
+                    <a:pt x="3211475" y="850938"/>
+                  </a:lnTo>
+                  <a:lnTo>
+                    <a:pt x="3050901" y="887030"/>
+                  </a:lnTo>
+                  <a:lnTo>
+                    <a:pt x="2890328" y="923288"/>
+                  </a:lnTo>
+                  <a:lnTo>
+                    <a:pt x="2729754" y="959744"/>
+                  </a:lnTo>
+                  <a:lnTo>
+                    <a:pt x="2569180" y="996435"/>
+                  </a:lnTo>
+                  <a:lnTo>
+                    <a:pt x="2408606" y="1033394"/>
+                  </a:lnTo>
+                  <a:lnTo>
+                    <a:pt x="2248032" y="1070650"/>
+                  </a:lnTo>
+                  <a:lnTo>
+                    <a:pt x="2087459" y="1108221"/>
+                  </a:lnTo>
+                  <a:lnTo>
+                    <a:pt x="1926885" y="1146111"/>
+                  </a:lnTo>
+                  <a:lnTo>
+                    <a:pt x="1766311" y="1184305"/>
+                  </a:lnTo>
+                  <a:lnTo>
+                    <a:pt x="1605737" y="1222780"/>
+                  </a:lnTo>
+                  <a:lnTo>
+                    <a:pt x="1445164" y="1261501"/>
+                  </a:lnTo>
+                  <a:lnTo>
+                    <a:pt x="1284590" y="1300434"/>
+                  </a:lnTo>
+                  <a:lnTo>
+                    <a:pt x="1124016" y="1339544"/>
+                  </a:lnTo>
+                  <a:lnTo>
+                    <a:pt x="963442" y="1378801"/>
+                  </a:lnTo>
+                  <a:lnTo>
+                    <a:pt x="802868" y="1418178"/>
+                  </a:lnTo>
+                  <a:lnTo>
+                    <a:pt x="642295" y="1457656"/>
+                  </a:lnTo>
+                  <a:lnTo>
+                    <a:pt x="481721" y="1497214"/>
+                  </a:lnTo>
+                  <a:lnTo>
+                    <a:pt x="321147" y="1536841"/>
+                  </a:lnTo>
+                  <a:lnTo>
+                    <a:pt x="160573" y="1576524"/>
+                  </a:lnTo>
+                  <a:lnTo>
+                    <a:pt x="0" y="1616254"/>
+                  </a:lnTo>
+                  <a:close/>
+                </a:path>
+              </a:pathLst>
+            </a:custGeom>
+            <a:solidFill>
+              <a:srgbClr val="E31A1C">
+                <a:alpha val="14901"/>
+              </a:srgbClr>
+            </a:solidFill>
+          </p:spPr>
+          <p:txBody>
+            <a:bodyPr/>
+            <a:lstStyle/>
+            <a:p/>
+          </p:txBody>
+        </p:sp>
+        <p:sp>
+          <p:nvSpPr>
+            <p:cNvPr id="967" name="pl967"/>
+            <p:cNvSpPr/>
+            <p:nvPr/>
+          </p:nvSpPr>
+          <p:spPr>
+            <a:xfrm>
+              <a:off x="2171462" y="3250053"/>
+              <a:ext cx="6445748" cy="1541176"/>
+            </a:xfrm>
+            <a:custGeom>
+              <a:avLst/>
+              <a:pathLst>
+                <a:path w="6445748" h="1541176">
+                  <a:moveTo>
+                    <a:pt x="0" y="1541176"/>
+                  </a:moveTo>
+                  <a:lnTo>
+                    <a:pt x="160573" y="1505647"/>
+                  </a:lnTo>
+                  <a:lnTo>
+                    <a:pt x="321147" y="1470071"/>
+                  </a:lnTo>
+                  <a:lnTo>
+                    <a:pt x="481721" y="1434439"/>
+                  </a:lnTo>
+                  <a:lnTo>
+                    <a:pt x="642295" y="1398739"/>
+                  </a:lnTo>
+                  <a:lnTo>
+                    <a:pt x="802868" y="1362957"/>
+                  </a:lnTo>
+                  <a:lnTo>
+                    <a:pt x="963442" y="1327076"/>
+                  </a:lnTo>
+                  <a:lnTo>
+                    <a:pt x="1124016" y="1291074"/>
+                  </a:lnTo>
+                  <a:lnTo>
+                    <a:pt x="1284590" y="1254925"/>
+                  </a:lnTo>
+                  <a:lnTo>
+                    <a:pt x="1445164" y="1218599"/>
+                  </a:lnTo>
+                  <a:lnTo>
+                    <a:pt x="1605737" y="1182061"/>
+                  </a:lnTo>
+                  <a:lnTo>
+                    <a:pt x="1766311" y="1145277"/>
+                  </a:lnTo>
+                  <a:lnTo>
+                    <a:pt x="1926885" y="1108212"/>
+                  </a:lnTo>
+                  <a:lnTo>
+                    <a:pt x="2087459" y="1070843"/>
+                  </a:lnTo>
+                  <a:lnTo>
+                    <a:pt x="2248032" y="1033155"/>
+                  </a:lnTo>
+                  <a:lnTo>
+                    <a:pt x="2408606" y="995153"/>
+                  </a:lnTo>
+                  <a:lnTo>
+                    <a:pt x="2569180" y="956853"/>
+                  </a:lnTo>
+                  <a:lnTo>
+                    <a:pt x="2729754" y="918284"/>
+                  </a:lnTo>
+                  <a:lnTo>
+                    <a:pt x="2890328" y="879482"/>
+                  </a:lnTo>
+                  <a:lnTo>
+                    <a:pt x="3050901" y="840481"/>
+                  </a:lnTo>
+                  <a:lnTo>
+                    <a:pt x="3211475" y="801314"/>
+                  </a:lnTo>
+                  <a:lnTo>
+                    <a:pt x="3372049" y="762011"/>
+                  </a:lnTo>
+                  <a:lnTo>
+                    <a:pt x="3532623" y="722595"/>
+                  </a:lnTo>
+                  <a:lnTo>
+                    <a:pt x="3693197" y="683086"/>
+                  </a:lnTo>
+                  <a:lnTo>
+                    <a:pt x="3853770" y="643501"/>
+                  </a:lnTo>
+                  <a:lnTo>
+                    <a:pt x="4014344" y="603853"/>
+                  </a:lnTo>
+                  <a:lnTo>
+                    <a:pt x="4174918" y="564152"/>
+                  </a:lnTo>
+                  <a:lnTo>
+                    <a:pt x="4335492" y="524407"/>
+                  </a:lnTo>
+                  <a:lnTo>
+                    <a:pt x="4496065" y="484625"/>
+                  </a:lnTo>
+                  <a:lnTo>
+                    <a:pt x="4656639" y="444811"/>
+                  </a:lnTo>
+                  <a:lnTo>
+                    <a:pt x="4817213" y="404971"/>
+                  </a:lnTo>
+                  <a:lnTo>
+                    <a:pt x="4977787" y="365107"/>
+                  </a:lnTo>
+                  <a:lnTo>
+                    <a:pt x="5138361" y="325223"/>
+                  </a:lnTo>
+                  <a:lnTo>
+                    <a:pt x="5298934" y="285322"/>
+                  </a:lnTo>
+                  <a:lnTo>
+                    <a:pt x="5459508" y="245406"/>
+                  </a:lnTo>
+                  <a:lnTo>
+                    <a:pt x="5620082" y="205476"/>
+                  </a:lnTo>
+                  <a:lnTo>
+                    <a:pt x="5780656" y="165535"/>
+                  </a:lnTo>
+                  <a:lnTo>
+                    <a:pt x="5941230" y="125583"/>
+                  </a:lnTo>
+                  <a:lnTo>
+                    <a:pt x="6101803" y="85622"/>
+                  </a:lnTo>
+                  <a:lnTo>
+                    <a:pt x="6262377" y="45653"/>
+                  </a:lnTo>
+                  <a:lnTo>
+                    <a:pt x="6422951" y="5676"/>
+                  </a:lnTo>
+                  <a:lnTo>
+                    <a:pt x="6445748" y="0"/>
+                  </a:lnTo>
+                </a:path>
+              </a:pathLst>
+            </a:custGeom>
+          </p:spPr>
+          <p:txBody>
+            <a:bodyPr/>
+            <a:lstStyle/>
+            <a:p/>
+          </p:txBody>
+        </p:sp>
+        <p:sp>
+          <p:nvSpPr>
+            <p:cNvPr id="968" name="pl968"/>
+            <p:cNvSpPr/>
+            <p:nvPr/>
+          </p:nvSpPr>
+          <p:spPr>
+            <a:xfrm>
+              <a:off x="2171462" y="3386443"/>
+              <a:ext cx="6445748" cy="1479863"/>
+            </a:xfrm>
+            <a:custGeom>
+              <a:avLst/>
+              <a:pathLst>
+                <a:path w="6445748" h="1479863">
+                  <a:moveTo>
+                    <a:pt x="6445748" y="0"/>
+                  </a:moveTo>
+                  <a:lnTo>
+                    <a:pt x="6422951" y="5008"/>
+                  </a:lnTo>
+                  <a:lnTo>
+                    <a:pt x="6262377" y="40290"/>
+                  </a:lnTo>
+                  <a:lnTo>
+                    <a:pt x="6101803" y="75579"/>
+                  </a:lnTo>
+                  <a:lnTo>
+                    <a:pt x="5941230" y="110877"/>
+                  </a:lnTo>
+                  <a:lnTo>
+                    <a:pt x="5780656" y="146184"/>
+                  </a:lnTo>
+                  <a:lnTo>
+                    <a:pt x="5620082" y="181502"/>
+                  </a:lnTo>
+                  <a:lnTo>
+                    <a:pt x="5459508" y="216831"/>
+                  </a:lnTo>
+                  <a:lnTo>
+                    <a:pt x="5298934" y="252174"/>
+                  </a:lnTo>
+                  <a:lnTo>
+                    <a:pt x="5138361" y="287532"/>
+                  </a:lnTo>
+                  <a:lnTo>
+                    <a:pt x="4977787" y="322907"/>
+                  </a:lnTo>
+                  <a:lnTo>
+                    <a:pt x="4817213" y="358302"/>
+                  </a:lnTo>
+                  <a:lnTo>
+                    <a:pt x="4656639" y="393720"/>
+                  </a:lnTo>
+                  <a:lnTo>
+                    <a:pt x="4496065" y="429166"/>
+                  </a:lnTo>
+                  <a:lnTo>
+                    <a:pt x="4335492" y="464642"/>
+                  </a:lnTo>
+                  <a:lnTo>
+                    <a:pt x="4174918" y="500156"/>
+                  </a:lnTo>
+                  <a:lnTo>
+                    <a:pt x="4014344" y="535714"/>
+                  </a:lnTo>
+                  <a:lnTo>
+                    <a:pt x="3853770" y="571325"/>
+                  </a:lnTo>
+                  <a:lnTo>
+                    <a:pt x="3693197" y="606999"/>
+                  </a:lnTo>
+                  <a:lnTo>
+                    <a:pt x="3532623" y="642749"/>
+                  </a:lnTo>
+                  <a:lnTo>
+                    <a:pt x="3372049" y="678592"/>
+                  </a:lnTo>
+                  <a:lnTo>
+                    <a:pt x="3211475" y="714547"/>
+                  </a:lnTo>
+                  <a:lnTo>
+                    <a:pt x="3050901" y="750639"/>
+                  </a:lnTo>
+                  <a:lnTo>
+                    <a:pt x="2890328" y="786897"/>
+                  </a:lnTo>
+                  <a:lnTo>
+                    <a:pt x="2729754" y="823354"/>
+                  </a:lnTo>
+                  <a:lnTo>
+                    <a:pt x="2569180" y="860044"/>
+                  </a:lnTo>
+                  <a:lnTo>
+                    <a:pt x="2408606" y="897003"/>
+                  </a:lnTo>
+                  <a:lnTo>
+                    <a:pt x="2248032" y="934260"/>
+                  </a:lnTo>
+                  <a:lnTo>
+                    <a:pt x="2087459" y="971831"/>
+                  </a:lnTo>
+                  <a:lnTo>
+                    <a:pt x="1926885" y="1009720"/>
+                  </a:lnTo>
+                  <a:lnTo>
+                    <a:pt x="1766311" y="1047915"/>
+                  </a:lnTo>
+                  <a:lnTo>
+                    <a:pt x="1605737" y="1086390"/>
+                  </a:lnTo>
+                  <a:lnTo>
+                    <a:pt x="1445164" y="1125111"/>
+                  </a:lnTo>
+                  <a:lnTo>
+                    <a:pt x="1284590" y="1164044"/>
+                  </a:lnTo>
+                  <a:lnTo>
+                    <a:pt x="1124016" y="1203154"/>
+                  </a:lnTo>
+                  <a:lnTo>
+                    <a:pt x="963442" y="1242410"/>
+                  </a:lnTo>
+                  <a:lnTo>
+                    <a:pt x="802868" y="1281788"/>
+                  </a:lnTo>
+                  <a:lnTo>
+                    <a:pt x="642295" y="1321265"/>
+                  </a:lnTo>
+                  <a:lnTo>
+                    <a:pt x="481721" y="1360824"/>
+                  </a:lnTo>
+                  <a:lnTo>
+                    <a:pt x="321147" y="1400451"/>
+                  </a:lnTo>
+                  <a:lnTo>
+                    <a:pt x="160573" y="1440134"/>
+                  </a:lnTo>
+                  <a:lnTo>
+                    <a:pt x="0" y="1479863"/>
+                  </a:lnTo>
+                </a:path>
+              </a:pathLst>
+            </a:custGeom>
+          </p:spPr>
+          <p:txBody>
+            <a:bodyPr/>
+            <a:lstStyle/>
+            <a:p/>
+          </p:txBody>
+        </p:sp>
+        <p:sp>
+          <p:nvSpPr>
+            <p:cNvPr id="969" name="pl969"/>
+            <p:cNvSpPr/>
+            <p:nvPr/>
+          </p:nvSpPr>
+          <p:spPr>
+            <a:xfrm>
+              <a:off x="2171462" y="3318248"/>
+              <a:ext cx="6445748" cy="1510520"/>
+            </a:xfrm>
+            <a:custGeom>
+              <a:avLst/>
+              <a:pathLst>
+                <a:path w="6445748" h="1510520">
+                  <a:moveTo>
+                    <a:pt x="0" y="1510520"/>
+                  </a:moveTo>
+                  <a:lnTo>
+                    <a:pt x="160573" y="1472890"/>
+                  </a:lnTo>
+                  <a:lnTo>
+                    <a:pt x="321147" y="1435261"/>
+                  </a:lnTo>
+                  <a:lnTo>
+                    <a:pt x="481721" y="1397631"/>
+                  </a:lnTo>
+                  <a:lnTo>
+                    <a:pt x="642295" y="1360002"/>
+                  </a:lnTo>
+                  <a:lnTo>
+                    <a:pt x="802868" y="1322373"/>
+                  </a:lnTo>
+                  <a:lnTo>
+                    <a:pt x="963442" y="1284743"/>
+                  </a:lnTo>
+                  <a:lnTo>
+                    <a:pt x="1124016" y="1247114"/>
+                  </a:lnTo>
+                  <a:lnTo>
+                    <a:pt x="1284590" y="1209484"/>
+                  </a:lnTo>
+                  <a:lnTo>
+                    <a:pt x="1445164" y="1171855"/>
+                  </a:lnTo>
+                  <a:lnTo>
+                    <a:pt x="1605737" y="1134225"/>
+                  </a:lnTo>
+                  <a:lnTo>
+                    <a:pt x="1766311" y="1096596"/>
+                  </a:lnTo>
+                  <a:lnTo>
+                    <a:pt x="1926885" y="1058966"/>
+                  </a:lnTo>
+                  <a:lnTo>
+                    <a:pt x="2087459" y="1021337"/>
+                  </a:lnTo>
+                  <a:lnTo>
+                    <a:pt x="2248032" y="983708"/>
+                  </a:lnTo>
+                  <a:lnTo>
+                    <a:pt x="2408606" y="946078"/>
+                  </a:lnTo>
+                  <a:lnTo>
+                    <a:pt x="2569180" y="908449"/>
+                  </a:lnTo>
+                  <a:lnTo>
+                    <a:pt x="2729754" y="870819"/>
+                  </a:lnTo>
+                  <a:lnTo>
+                    <a:pt x="2890328" y="833190"/>
+                  </a:lnTo>
+                  <a:lnTo>
+                    <a:pt x="3050901" y="795560"/>
+                  </a:lnTo>
+                  <a:lnTo>
+                    <a:pt x="3211475" y="757931"/>
+                  </a:lnTo>
+                  <a:lnTo>
+                    <a:pt x="3372049" y="720301"/>
+                  </a:lnTo>
+                  <a:lnTo>
+                    <a:pt x="3532623" y="682672"/>
+                  </a:lnTo>
+                  <a:lnTo>
+                    <a:pt x="3693197" y="645042"/>
+                  </a:lnTo>
+                  <a:lnTo>
+                    <a:pt x="3853770" y="607413"/>
+                  </a:lnTo>
+                  <a:lnTo>
+                    <a:pt x="4014344" y="569784"/>
+                  </a:lnTo>
+                  <a:lnTo>
+                    <a:pt x="4174918" y="532154"/>
+                  </a:lnTo>
+                  <a:lnTo>
+                    <a:pt x="4335492" y="494525"/>
+                  </a:lnTo>
+                  <a:lnTo>
+                    <a:pt x="4496065" y="456895"/>
+                  </a:lnTo>
+                  <a:lnTo>
+                    <a:pt x="4656639" y="419266"/>
+                  </a:lnTo>
+                  <a:lnTo>
+                    <a:pt x="4817213" y="381636"/>
+                  </a:lnTo>
+                  <a:lnTo>
+                    <a:pt x="4977787" y="344007"/>
+                  </a:lnTo>
+                  <a:lnTo>
+                    <a:pt x="5138361" y="306377"/>
+                  </a:lnTo>
+                  <a:lnTo>
+                    <a:pt x="5298934" y="268748"/>
+                  </a:lnTo>
+                  <a:lnTo>
+                    <a:pt x="5459508" y="231119"/>
+                  </a:lnTo>
+                  <a:lnTo>
+                    <a:pt x="5620082" y="193489"/>
+                  </a:lnTo>
+                  <a:lnTo>
+                    <a:pt x="5780656" y="155860"/>
+                  </a:lnTo>
+                  <a:lnTo>
+                    <a:pt x="5941230" y="118230"/>
+                  </a:lnTo>
+                  <a:lnTo>
+                    <a:pt x="6101803" y="80601"/>
+                  </a:lnTo>
+                  <a:lnTo>
+                    <a:pt x="6262377" y="42971"/>
+                  </a:lnTo>
+                  <a:lnTo>
+                    <a:pt x="6422951" y="5342"/>
+                  </a:lnTo>
+                  <a:lnTo>
+                    <a:pt x="6445748" y="0"/>
+                  </a:lnTo>
+                </a:path>
+              </a:pathLst>
+            </a:custGeom>
+            <a:ln w="27101" cap="flat">
+              <a:solidFill>
+                <a:srgbClr val="E31A1C">
+                  <a:alpha val="100000"/>
+                </a:srgbClr>
+              </a:solidFill>
+              <a:prstDash val="solid"/>
+              <a:round/>
+            </a:ln>
+          </p:spPr>
+          <p:txBody>
+            <a:bodyPr/>
+            <a:lstStyle/>
+            <a:p/>
+          </p:txBody>
+        </p:sp>
+        <p:sp>
+          <p:nvSpPr>
+            <p:cNvPr id="970" name="pg970"/>
+            <p:cNvSpPr/>
+            <p:nvPr/>
+          </p:nvSpPr>
+          <p:spPr>
+            <a:xfrm>
+              <a:off x="1985667" y="3084038"/>
+              <a:ext cx="6631543" cy="1805060"/>
+            </a:xfrm>
+            <a:custGeom>
+              <a:avLst/>
+              <a:pathLst>
+                <a:path w="6631543" h="1805060">
+                  <a:moveTo>
+                    <a:pt x="0" y="1698705"/>
+                  </a:moveTo>
+                  <a:lnTo>
+                    <a:pt x="100748" y="1674941"/>
+                  </a:lnTo>
+                  <a:lnTo>
+                    <a:pt x="201497" y="1651166"/>
+                  </a:lnTo>
+                  <a:lnTo>
+                    <a:pt x="302245" y="1627376"/>
+                  </a:lnTo>
+                  <a:lnTo>
+                    <a:pt x="402994" y="1603571"/>
+                  </a:lnTo>
+                  <a:lnTo>
+                    <a:pt x="503742" y="1579750"/>
+                  </a:lnTo>
+                  <a:lnTo>
+                    <a:pt x="604491" y="1555909"/>
+                  </a:lnTo>
+                  <a:lnTo>
+                    <a:pt x="705239" y="1532047"/>
+                  </a:lnTo>
+                  <a:lnTo>
+                    <a:pt x="805988" y="1508162"/>
+                  </a:lnTo>
+                  <a:lnTo>
+                    <a:pt x="906737" y="1484250"/>
+                  </a:lnTo>
+                  <a:lnTo>
+                    <a:pt x="1007485" y="1460309"/>
+                  </a:lnTo>
+                  <a:lnTo>
+                    <a:pt x="1108234" y="1436334"/>
+                  </a:lnTo>
+                  <a:lnTo>
+                    <a:pt x="1208982" y="1412322"/>
+                  </a:lnTo>
+                  <a:lnTo>
+                    <a:pt x="1309731" y="1388267"/>
+                  </a:lnTo>
+                  <a:lnTo>
+                    <a:pt x="1410479" y="1364163"/>
+                  </a:lnTo>
+                  <a:lnTo>
+                    <a:pt x="1511228" y="1340005"/>
+                  </a:lnTo>
+                  <a:lnTo>
+                    <a:pt x="1611976" y="1315785"/>
+                  </a:lnTo>
+                  <a:lnTo>
+                    <a:pt x="1712725" y="1291495"/>
+                  </a:lnTo>
+                  <a:lnTo>
+                    <a:pt x="1813474" y="1267126"/>
+                  </a:lnTo>
+                  <a:lnTo>
+                    <a:pt x="1914222" y="1242668"/>
+                  </a:lnTo>
+                  <a:lnTo>
+                    <a:pt x="2014971" y="1218111"/>
+                  </a:lnTo>
+                  <a:lnTo>
+                    <a:pt x="2115719" y="1193442"/>
+                  </a:lnTo>
+                  <a:lnTo>
+                    <a:pt x="2216468" y="1168653"/>
+                  </a:lnTo>
+                  <a:lnTo>
+                    <a:pt x="2317216" y="1143732"/>
+                  </a:lnTo>
+                  <a:lnTo>
+                    <a:pt x="2417965" y="1118669"/>
+                  </a:lnTo>
+                  <a:lnTo>
+                    <a:pt x="2518714" y="1093459"/>
+                  </a:lnTo>
+                  <a:lnTo>
+                    <a:pt x="2619462" y="1068095"/>
+                  </a:lnTo>
+                  <a:lnTo>
+                    <a:pt x="2720211" y="1042578"/>
+                  </a:lnTo>
+                  <a:lnTo>
+                    <a:pt x="2820959" y="1016907"/>
+                  </a:lnTo>
+                  <a:lnTo>
+                    <a:pt x="2921708" y="991089"/>
+                  </a:lnTo>
+                  <a:lnTo>
+                    <a:pt x="3022456" y="965129"/>
+                  </a:lnTo>
+                  <a:lnTo>
+                    <a:pt x="3123205" y="939037"/>
+                  </a:lnTo>
+                  <a:lnTo>
+                    <a:pt x="3223953" y="912823"/>
+                  </a:lnTo>
+                  <a:lnTo>
+                    <a:pt x="3324702" y="886498"/>
+                  </a:lnTo>
+                  <a:lnTo>
+                    <a:pt x="3425451" y="860074"/>
+                  </a:lnTo>
+                  <a:lnTo>
+                    <a:pt x="3526199" y="833560"/>
+                  </a:lnTo>
+                  <a:lnTo>
+                    <a:pt x="3626948" y="806966"/>
+                  </a:lnTo>
+                  <a:lnTo>
+                    <a:pt x="3727696" y="780303"/>
+                  </a:lnTo>
+                  <a:lnTo>
+                    <a:pt x="3828445" y="753577"/>
+                  </a:lnTo>
+                  <a:lnTo>
+                    <a:pt x="3929193" y="726796"/>
+                  </a:lnTo>
+                  <a:lnTo>
+                    <a:pt x="4029942" y="699967"/>
+                  </a:lnTo>
+                  <a:lnTo>
+                    <a:pt x="4130691" y="673096"/>
+                  </a:lnTo>
+                  <a:lnTo>
+                    <a:pt x="4231439" y="646186"/>
+                  </a:lnTo>
+                  <a:lnTo>
+                    <a:pt x="4332188" y="619243"/>
+                  </a:lnTo>
+                  <a:lnTo>
+                    <a:pt x="4432936" y="592270"/>
+                  </a:lnTo>
+                  <a:lnTo>
+                    <a:pt x="4533685" y="565270"/>
+                  </a:lnTo>
+                  <a:lnTo>
+                    <a:pt x="4634433" y="538247"/>
+                  </a:lnTo>
+                  <a:lnTo>
+                    <a:pt x="4735182" y="511203"/>
+                  </a:lnTo>
+                  <a:lnTo>
+                    <a:pt x="4835930" y="484140"/>
+                  </a:lnTo>
+                  <a:lnTo>
+                    <a:pt x="4936679" y="457060"/>
+                  </a:lnTo>
+                  <a:lnTo>
+                    <a:pt x="5037428" y="429965"/>
+                  </a:lnTo>
+                  <a:lnTo>
+                    <a:pt x="5138176" y="402855"/>
+                  </a:lnTo>
+                  <a:lnTo>
+                    <a:pt x="5238925" y="375733"/>
+                  </a:lnTo>
+                  <a:lnTo>
+                    <a:pt x="5339673" y="348600"/>
+                  </a:lnTo>
+                  <a:lnTo>
+                    <a:pt x="5440422" y="321456"/>
+                  </a:lnTo>
+                  <a:lnTo>
+                    <a:pt x="5541170" y="294303"/>
+                  </a:lnTo>
+                  <a:lnTo>
+                    <a:pt x="5641919" y="267141"/>
+                  </a:lnTo>
+                  <a:lnTo>
+                    <a:pt x="5742668" y="239971"/>
+                  </a:lnTo>
+                  <a:lnTo>
+                    <a:pt x="5843416" y="212794"/>
+                  </a:lnTo>
+                  <a:lnTo>
+                    <a:pt x="5944165" y="185610"/>
+                  </a:lnTo>
+                  <a:lnTo>
+                    <a:pt x="6044913" y="158420"/>
+                  </a:lnTo>
+                  <a:lnTo>
+                    <a:pt x="6145662" y="131225"/>
+                  </a:lnTo>
+                  <a:lnTo>
+                    <a:pt x="6246410" y="104024"/>
+                  </a:lnTo>
+                  <a:lnTo>
+                    <a:pt x="6347159" y="76818"/>
+                  </a:lnTo>
+                  <a:lnTo>
+                    <a:pt x="6447907" y="49607"/>
+                  </a:lnTo>
+                  <a:lnTo>
+                    <a:pt x="6548656" y="22393"/>
+                  </a:lnTo>
+                  <a:lnTo>
+                    <a:pt x="6631543" y="0"/>
+                  </a:lnTo>
+                  <a:lnTo>
+                    <a:pt x="6631543" y="154346"/>
+                  </a:lnTo>
+                  <a:lnTo>
+                    <a:pt x="6548656" y="173817"/>
+                  </a:lnTo>
+                  <a:lnTo>
+                    <a:pt x="6447907" y="197488"/>
+                  </a:lnTo>
+                  <a:lnTo>
+                    <a:pt x="6347159" y="221163"/>
+                  </a:lnTo>
+                  <a:lnTo>
+                    <a:pt x="6246410" y="244843"/>
+                  </a:lnTo>
+                  <a:lnTo>
+                    <a:pt x="6145662" y="268527"/>
+                  </a:lnTo>
+                  <a:lnTo>
+                    <a:pt x="6044913" y="292217"/>
+                  </a:lnTo>
+                  <a:lnTo>
+                    <a:pt x="5944165" y="315912"/>
+                  </a:lnTo>
+                  <a:lnTo>
+                    <a:pt x="5843416" y="339614"/>
+                  </a:lnTo>
+                  <a:lnTo>
+                    <a:pt x="5742668" y="363322"/>
+                  </a:lnTo>
+                  <a:lnTo>
+                    <a:pt x="5641919" y="387038"/>
+                  </a:lnTo>
+                  <a:lnTo>
+                    <a:pt x="5541170" y="410762"/>
+                  </a:lnTo>
+                  <a:lnTo>
+                    <a:pt x="5440422" y="434494"/>
+                  </a:lnTo>
+                  <a:lnTo>
+                    <a:pt x="5339673" y="458236"/>
+                  </a:lnTo>
+                  <a:lnTo>
+                    <a:pt x="5238925" y="481988"/>
+                  </a:lnTo>
+                  <a:lnTo>
+                    <a:pt x="5138176" y="505751"/>
+                  </a:lnTo>
+                  <a:lnTo>
+                    <a:pt x="5037428" y="529527"/>
+                  </a:lnTo>
+                  <a:lnTo>
+                    <a:pt x="4936679" y="553317"/>
+                  </a:lnTo>
+                  <a:lnTo>
+                    <a:pt x="4835930" y="577123"/>
+                  </a:lnTo>
+                  <a:lnTo>
+                    <a:pt x="4735182" y="600945"/>
+                  </a:lnTo>
+                  <a:lnTo>
+                    <a:pt x="4634433" y="624786"/>
+                  </a:lnTo>
+                  <a:lnTo>
+                    <a:pt x="4533685" y="648649"/>
+                  </a:lnTo>
+                  <a:lnTo>
+                    <a:pt x="4432936" y="672535"/>
+                  </a:lnTo>
+                  <a:lnTo>
+                    <a:pt x="4332188" y="696447"/>
+                  </a:lnTo>
+                  <a:lnTo>
+                    <a:pt x="4231439" y="720389"/>
+                  </a:lnTo>
+                  <a:lnTo>
+                    <a:pt x="4130691" y="744365"/>
+                  </a:lnTo>
+                  <a:lnTo>
+                    <a:pt x="4029942" y="768379"/>
+                  </a:lnTo>
+                  <a:lnTo>
+                    <a:pt x="3929193" y="792435"/>
+                  </a:lnTo>
+                  <a:lnTo>
+                    <a:pt x="3828445" y="816540"/>
+                  </a:lnTo>
+                  <a:lnTo>
+                    <a:pt x="3727696" y="840700"/>
+                  </a:lnTo>
+                  <a:lnTo>
+                    <a:pt x="3626948" y="864922"/>
+                  </a:lnTo>
+                  <a:lnTo>
+                    <a:pt x="3526199" y="889214"/>
+                  </a:lnTo>
+                  <a:lnTo>
+                    <a:pt x="3425451" y="913586"/>
+                  </a:lnTo>
+                  <a:lnTo>
+                    <a:pt x="3324702" y="938046"/>
+                  </a:lnTo>
+                  <a:lnTo>
+                    <a:pt x="3223953" y="962607"/>
+                  </a:lnTo>
+                  <a:lnTo>
+                    <a:pt x="3123205" y="987279"/>
+                  </a:lnTo>
+                  <a:lnTo>
+                    <a:pt x="3022456" y="1012072"/>
+                  </a:lnTo>
+                  <a:lnTo>
+                    <a:pt x="2921708" y="1036998"/>
+                  </a:lnTo>
+                  <a:lnTo>
+                    <a:pt x="2820959" y="1062064"/>
+                  </a:lnTo>
+                  <a:lnTo>
+                    <a:pt x="2720211" y="1087279"/>
+                  </a:lnTo>
+                  <a:lnTo>
+                    <a:pt x="2619462" y="1112647"/>
+                  </a:lnTo>
+                  <a:lnTo>
+                    <a:pt x="2518714" y="1138170"/>
+                  </a:lnTo>
+                  <a:lnTo>
+                    <a:pt x="2417965" y="1163845"/>
+                  </a:lnTo>
+                  <a:lnTo>
+                    <a:pt x="2317216" y="1189668"/>
+                  </a:lnTo>
+                  <a:lnTo>
+                    <a:pt x="2216468" y="1215632"/>
+                  </a:lnTo>
+                  <a:lnTo>
+                    <a:pt x="2115719" y="1241728"/>
+                  </a:lnTo>
+                  <a:lnTo>
+                    <a:pt x="2014971" y="1267945"/>
+                  </a:lnTo>
+                  <a:lnTo>
+                    <a:pt x="1914222" y="1294273"/>
+                  </a:lnTo>
+                  <a:lnTo>
+                    <a:pt x="1813474" y="1320700"/>
+                  </a:lnTo>
+                  <a:lnTo>
+                    <a:pt x="1712725" y="1347216"/>
+                  </a:lnTo>
+                  <a:lnTo>
+                    <a:pt x="1611976" y="1373812"/>
+                  </a:lnTo>
+                  <a:lnTo>
+                    <a:pt x="1511228" y="1400478"/>
+                  </a:lnTo>
+                  <a:lnTo>
+                    <a:pt x="1410479" y="1427205"/>
+                  </a:lnTo>
+                  <a:lnTo>
+                    <a:pt x="1309731" y="1453987"/>
+                  </a:lnTo>
+                  <a:lnTo>
+                    <a:pt x="1208982" y="1480818"/>
+                  </a:lnTo>
+                  <a:lnTo>
+                    <a:pt x="1108234" y="1507691"/>
+                  </a:lnTo>
+                  <a:lnTo>
+                    <a:pt x="1007485" y="1534601"/>
+                  </a:lnTo>
+                  <a:lnTo>
+                    <a:pt x="906737" y="1561545"/>
+                  </a:lnTo>
+                  <a:lnTo>
+                    <a:pt x="805988" y="1588519"/>
+                  </a:lnTo>
+                  <a:lnTo>
+                    <a:pt x="705239" y="1615519"/>
+                  </a:lnTo>
+                  <a:lnTo>
+                    <a:pt x="604491" y="1642543"/>
+                  </a:lnTo>
+                  <a:lnTo>
+                    <a:pt x="503742" y="1669588"/>
+                  </a:lnTo>
+                  <a:lnTo>
+                    <a:pt x="402994" y="1696651"/>
+                  </a:lnTo>
+                  <a:lnTo>
+                    <a:pt x="302245" y="1723732"/>
+                  </a:lnTo>
+                  <a:lnTo>
+                    <a:pt x="201497" y="1750828"/>
+                  </a:lnTo>
+                  <a:lnTo>
+                    <a:pt x="100748" y="1777938"/>
+                  </a:lnTo>
+                  <a:lnTo>
+                    <a:pt x="0" y="1805060"/>
+                  </a:lnTo>
+                  <a:close/>
+                </a:path>
+              </a:pathLst>
+            </a:custGeom>
+            <a:solidFill>
+              <a:srgbClr val="999999">
+                <a:alpha val="14901"/>
+              </a:srgbClr>
+            </a:solidFill>
+          </p:spPr>
+          <p:txBody>
+            <a:bodyPr/>
+            <a:lstStyle/>
+            <a:p/>
+          </p:txBody>
+        </p:sp>
+        <p:sp>
+          <p:nvSpPr>
+            <p:cNvPr id="971" name="pl971"/>
+            <p:cNvSpPr/>
+            <p:nvPr/>
+          </p:nvSpPr>
+          <p:spPr>
+            <a:xfrm>
+              <a:off x="1985667" y="3084038"/>
+              <a:ext cx="6631543" cy="1698705"/>
+            </a:xfrm>
+            <a:custGeom>
+              <a:avLst/>
+              <a:pathLst>
+                <a:path w="6631543" h="1698705">
+                  <a:moveTo>
+                    <a:pt x="0" y="1698705"/>
+                  </a:moveTo>
+                  <a:lnTo>
+                    <a:pt x="100748" y="1674941"/>
+                  </a:lnTo>
+                  <a:lnTo>
+                    <a:pt x="201497" y="1651166"/>
+                  </a:lnTo>
+                  <a:lnTo>
+                    <a:pt x="302245" y="1627376"/>
+                  </a:lnTo>
+                  <a:lnTo>
+                    <a:pt x="402994" y="1603571"/>
+                  </a:lnTo>
+                  <a:lnTo>
+                    <a:pt x="503742" y="1579750"/>
+                  </a:lnTo>
+                  <a:lnTo>
+                    <a:pt x="604491" y="1555909"/>
+                  </a:lnTo>
+                  <a:lnTo>
+                    <a:pt x="705239" y="1532047"/>
+                  </a:lnTo>
+                  <a:lnTo>
+                    <a:pt x="805988" y="1508162"/>
+                  </a:lnTo>
+                  <a:lnTo>
+                    <a:pt x="906737" y="1484250"/>
+                  </a:lnTo>
+                  <a:lnTo>
+                    <a:pt x="1007485" y="1460309"/>
+                  </a:lnTo>
+                  <a:lnTo>
+                    <a:pt x="1108234" y="1436334"/>
+                  </a:lnTo>
+                  <a:lnTo>
+                    <a:pt x="1208982" y="1412322"/>
+                  </a:lnTo>
+                  <a:lnTo>
+                    <a:pt x="1309731" y="1388267"/>
+                  </a:lnTo>
+                  <a:lnTo>
+                    <a:pt x="1410479" y="1364163"/>
+                  </a:lnTo>
+                  <a:lnTo>
+                    <a:pt x="1511228" y="1340005"/>
+                  </a:lnTo>
+                  <a:lnTo>
+                    <a:pt x="1611976" y="1315785"/>
+                  </a:lnTo>
+                  <a:lnTo>
+                    <a:pt x="1712725" y="1291495"/>
+                  </a:lnTo>
+                  <a:lnTo>
+                    <a:pt x="1813474" y="1267126"/>
+                  </a:lnTo>
+                  <a:lnTo>
+                    <a:pt x="1914222" y="1242668"/>
+                  </a:lnTo>
+                  <a:lnTo>
+                    <a:pt x="2014971" y="1218111"/>
+                  </a:lnTo>
+                  <a:lnTo>
+                    <a:pt x="2115719" y="1193442"/>
+                  </a:lnTo>
+                  <a:lnTo>
+                    <a:pt x="2216468" y="1168653"/>
+                  </a:lnTo>
+                  <a:lnTo>
+                    <a:pt x="2317216" y="1143732"/>
+                  </a:lnTo>
+                  <a:lnTo>
+                    <a:pt x="2417965" y="1118669"/>
+                  </a:lnTo>
+                  <a:lnTo>
+                    <a:pt x="2518714" y="1093459"/>
+                  </a:lnTo>
+                  <a:lnTo>
+                    <a:pt x="2619462" y="1068095"/>
+                  </a:lnTo>
+                  <a:lnTo>
+                    <a:pt x="2720211" y="1042578"/>
+                  </a:lnTo>
+                  <a:lnTo>
+                    <a:pt x="2820959" y="1016907"/>
+                  </a:lnTo>
+                  <a:lnTo>
+                    <a:pt x="2921708" y="991089"/>
+                  </a:lnTo>
+                  <a:lnTo>
+                    <a:pt x="3022456" y="965129"/>
+                  </a:lnTo>
+                  <a:lnTo>
+                    <a:pt x="3123205" y="939037"/>
+                  </a:lnTo>
+                  <a:lnTo>
+                    <a:pt x="3223953" y="912823"/>
+                  </a:lnTo>
+                  <a:lnTo>
+                    <a:pt x="3324702" y="886498"/>
+                  </a:lnTo>
+                  <a:lnTo>
+                    <a:pt x="3425451" y="860074"/>
+                  </a:lnTo>
+                  <a:lnTo>
+                    <a:pt x="3526199" y="833560"/>
+                  </a:lnTo>
+                  <a:lnTo>
+                    <a:pt x="3626948" y="806966"/>
+                  </a:lnTo>
+                  <a:lnTo>
+                    <a:pt x="3727696" y="780303"/>
+                  </a:lnTo>
+                  <a:lnTo>
+                    <a:pt x="3828445" y="753577"/>
+                  </a:lnTo>
+                  <a:lnTo>
+                    <a:pt x="3929193" y="726796"/>
+                  </a:lnTo>
+                  <a:lnTo>
+                    <a:pt x="4029942" y="699967"/>
+                  </a:lnTo>
+                  <a:lnTo>
+                    <a:pt x="4130691" y="673096"/>
+                  </a:lnTo>
+                  <a:lnTo>
+                    <a:pt x="4231439" y="646186"/>
+                  </a:lnTo>
+                  <a:lnTo>
+                    <a:pt x="4332188" y="619243"/>
+                  </a:lnTo>
+                  <a:lnTo>
+                    <a:pt x="4432936" y="592270"/>
+                  </a:lnTo>
+                  <a:lnTo>
+                    <a:pt x="4533685" y="565270"/>
+                  </a:lnTo>
+                  <a:lnTo>
+                    <a:pt x="4634433" y="538247"/>
+                  </a:lnTo>
+                  <a:lnTo>
+                    <a:pt x="4735182" y="511203"/>
+                  </a:lnTo>
+                  <a:lnTo>
+                    <a:pt x="4835930" y="484140"/>
+                  </a:lnTo>
+                  <a:lnTo>
+                    <a:pt x="4936679" y="457060"/>
+                  </a:lnTo>
+                  <a:lnTo>
+                    <a:pt x="5037428" y="429965"/>
+                  </a:lnTo>
+                  <a:lnTo>
+                    <a:pt x="5138176" y="402855"/>
+                  </a:lnTo>
+                  <a:lnTo>
+                    <a:pt x="5238925" y="375733"/>
+                  </a:lnTo>
+                  <a:lnTo>
+                    <a:pt x="5339673" y="348600"/>
+                  </a:lnTo>
+                  <a:lnTo>
+                    <a:pt x="5440422" y="321456"/>
+                  </a:lnTo>
+                  <a:lnTo>
+                    <a:pt x="5541170" y="294303"/>
+                  </a:lnTo>
+                  <a:lnTo>
+                    <a:pt x="5641919" y="267141"/>
+                  </a:lnTo>
+                  <a:lnTo>
+                    <a:pt x="5742668" y="239971"/>
+                  </a:lnTo>
+                  <a:lnTo>
+                    <a:pt x="5843416" y="212794"/>
+                  </a:lnTo>
+                  <a:lnTo>
+                    <a:pt x="5944165" y="185610"/>
+                  </a:lnTo>
+                  <a:lnTo>
+                    <a:pt x="6044913" y="158420"/>
+                  </a:lnTo>
+                  <a:lnTo>
+                    <a:pt x="6145662" y="131225"/>
+                  </a:lnTo>
+                  <a:lnTo>
+                    <a:pt x="6246410" y="104024"/>
+                  </a:lnTo>
+                  <a:lnTo>
+                    <a:pt x="6347159" y="76818"/>
+                  </a:lnTo>
+                  <a:lnTo>
+                    <a:pt x="6447907" y="49607"/>
+                  </a:lnTo>
+                  <a:lnTo>
+                    <a:pt x="6548656" y="22393"/>
+                  </a:lnTo>
+                  <a:lnTo>
+                    <a:pt x="6631543" y="0"/>
+                  </a:lnTo>
+                </a:path>
+              </a:pathLst>
+            </a:custGeom>
+          </p:spPr>
+          <p:txBody>
+            <a:bodyPr/>
+            <a:lstStyle/>
+            <a:p/>
+          </p:txBody>
+        </p:sp>
+        <p:sp>
+          <p:nvSpPr>
+            <p:cNvPr id="972" name="pl972"/>
+            <p:cNvSpPr/>
+            <p:nvPr/>
+          </p:nvSpPr>
+          <p:spPr>
+            <a:xfrm>
+              <a:off x="1985667" y="3238384"/>
+              <a:ext cx="6631543" cy="1650713"/>
+            </a:xfrm>
+            <a:custGeom>
+              <a:avLst/>
+              <a:pathLst>
+                <a:path w="6631543" h="1650713">
+                  <a:moveTo>
+                    <a:pt x="6631543" y="0"/>
+                  </a:moveTo>
+                  <a:lnTo>
+                    <a:pt x="6548656" y="19471"/>
+                  </a:lnTo>
+                  <a:lnTo>
+                    <a:pt x="6447907" y="43141"/>
+                  </a:lnTo>
+                  <a:lnTo>
+                    <a:pt x="6347159" y="66816"/>
+                  </a:lnTo>
+                  <a:lnTo>
+                    <a:pt x="6246410" y="90496"/>
+                  </a:lnTo>
+                  <a:lnTo>
+                    <a:pt x="6145662" y="114180"/>
+                  </a:lnTo>
+                  <a:lnTo>
+                    <a:pt x="6044913" y="137870"/>
+                  </a:lnTo>
+                  <a:lnTo>
+                    <a:pt x="5944165" y="161565"/>
+                  </a:lnTo>
+                  <a:lnTo>
+                    <a:pt x="5843416" y="185267"/>
+                  </a:lnTo>
+                  <a:lnTo>
+                    <a:pt x="5742668" y="208975"/>
+                  </a:lnTo>
+                  <a:lnTo>
+                    <a:pt x="5641919" y="232691"/>
+                  </a:lnTo>
+                  <a:lnTo>
+                    <a:pt x="5541170" y="256415"/>
+                  </a:lnTo>
+                  <a:lnTo>
+                    <a:pt x="5440422" y="280147"/>
+                  </a:lnTo>
+                  <a:lnTo>
+                    <a:pt x="5339673" y="303889"/>
+                  </a:lnTo>
+                  <a:lnTo>
+                    <a:pt x="5238925" y="327641"/>
+                  </a:lnTo>
+                  <a:lnTo>
+                    <a:pt x="5138176" y="351404"/>
+                  </a:lnTo>
+                  <a:lnTo>
+                    <a:pt x="5037428" y="375180"/>
+                  </a:lnTo>
+                  <a:lnTo>
+                    <a:pt x="4936679" y="398970"/>
+                  </a:lnTo>
+                  <a:lnTo>
+                    <a:pt x="4835930" y="422776"/>
+                  </a:lnTo>
+                  <a:lnTo>
+                    <a:pt x="4735182" y="446598"/>
+                  </a:lnTo>
+                  <a:lnTo>
+                    <a:pt x="4634433" y="470439"/>
+                  </a:lnTo>
+                  <a:lnTo>
+                    <a:pt x="4533685" y="494302"/>
+                  </a:lnTo>
+                  <a:lnTo>
+                    <a:pt x="4432936" y="518188"/>
+                  </a:lnTo>
+                  <a:lnTo>
+                    <a:pt x="4332188" y="542100"/>
+                  </a:lnTo>
+                  <a:lnTo>
+                    <a:pt x="4231439" y="566043"/>
+                  </a:lnTo>
+                  <a:lnTo>
+                    <a:pt x="4130691" y="590018"/>
+                  </a:lnTo>
+                  <a:lnTo>
+                    <a:pt x="4029942" y="614032"/>
+                  </a:lnTo>
+                  <a:lnTo>
+                    <a:pt x="3929193" y="638089"/>
+                  </a:lnTo>
+                  <a:lnTo>
+                    <a:pt x="3828445" y="662193"/>
+                  </a:lnTo>
+                  <a:lnTo>
+                    <a:pt x="3727696" y="686353"/>
+                  </a:lnTo>
+                  <a:lnTo>
+                    <a:pt x="3626948" y="710575"/>
+                  </a:lnTo>
+                  <a:lnTo>
+                    <a:pt x="3526199" y="734867"/>
+                  </a:lnTo>
+                  <a:lnTo>
+                    <a:pt x="3425451" y="759239"/>
+                  </a:lnTo>
+                  <a:lnTo>
+                    <a:pt x="3324702" y="783700"/>
+                  </a:lnTo>
+                  <a:lnTo>
+                    <a:pt x="3223953" y="808260"/>
+                  </a:lnTo>
+                  <a:lnTo>
+                    <a:pt x="3123205" y="832932"/>
+                  </a:lnTo>
+                  <a:lnTo>
+                    <a:pt x="3022456" y="857725"/>
+                  </a:lnTo>
+                  <a:lnTo>
+                    <a:pt x="2921708" y="882651"/>
+                  </a:lnTo>
+                  <a:lnTo>
+                    <a:pt x="2820959" y="907718"/>
+                  </a:lnTo>
+                  <a:lnTo>
+                    <a:pt x="2720211" y="932933"/>
+                  </a:lnTo>
+                  <a:lnTo>
+                    <a:pt x="2619462" y="958300"/>
+                  </a:lnTo>
+                  <a:lnTo>
+                    <a:pt x="2518714" y="983823"/>
+                  </a:lnTo>
+                  <a:lnTo>
+                    <a:pt x="2417965" y="1009498"/>
+                  </a:lnTo>
+                  <a:lnTo>
+                    <a:pt x="2317216" y="1035321"/>
+                  </a:lnTo>
+                  <a:lnTo>
+                    <a:pt x="2216468" y="1061285"/>
+                  </a:lnTo>
+                  <a:lnTo>
+                    <a:pt x="2115719" y="1087381"/>
+                  </a:lnTo>
+                  <a:lnTo>
+                    <a:pt x="2014971" y="1113598"/>
+                  </a:lnTo>
+                  <a:lnTo>
+                    <a:pt x="1914222" y="1139926"/>
+                  </a:lnTo>
+                  <a:lnTo>
+                    <a:pt x="1813474" y="1166353"/>
+                  </a:lnTo>
+                  <a:lnTo>
+                    <a:pt x="1712725" y="1192870"/>
+                  </a:lnTo>
+                  <a:lnTo>
+                    <a:pt x="1611976" y="1219465"/>
+                  </a:lnTo>
+                  <a:lnTo>
+                    <a:pt x="1511228" y="1246131"/>
+                  </a:lnTo>
+                  <a:lnTo>
+                    <a:pt x="1410479" y="1272858"/>
+                  </a:lnTo>
+                  <a:lnTo>
+                    <a:pt x="1309731" y="1299640"/>
+                  </a:lnTo>
+                  <a:lnTo>
+                    <a:pt x="1208982" y="1326471"/>
+                  </a:lnTo>
+                  <a:lnTo>
+                    <a:pt x="1108234" y="1353344"/>
+                  </a:lnTo>
+                  <a:lnTo>
+                    <a:pt x="1007485" y="1380254"/>
+                  </a:lnTo>
+                  <a:lnTo>
+                    <a:pt x="906737" y="1407199"/>
+                  </a:lnTo>
+                  <a:lnTo>
+                    <a:pt x="805988" y="1434172"/>
+                  </a:lnTo>
+                  <a:lnTo>
+                    <a:pt x="705239" y="1461172"/>
+                  </a:lnTo>
+                  <a:lnTo>
+                    <a:pt x="604491" y="1488196"/>
+                  </a:lnTo>
+                  <a:lnTo>
+                    <a:pt x="503742" y="1515241"/>
+                  </a:lnTo>
+                  <a:lnTo>
+                    <a:pt x="402994" y="1542305"/>
+                  </a:lnTo>
+                  <a:lnTo>
+                    <a:pt x="302245" y="1569385"/>
+                  </a:lnTo>
+                  <a:lnTo>
+                    <a:pt x="201497" y="1596481"/>
+                  </a:lnTo>
+                  <a:lnTo>
+                    <a:pt x="100748" y="1623591"/>
+                  </a:lnTo>
+                  <a:lnTo>
+                    <a:pt x="0" y="1650713"/>
+                  </a:lnTo>
+                </a:path>
+              </a:pathLst>
+            </a:custGeom>
+          </p:spPr>
+          <p:txBody>
+            <a:bodyPr/>
+            <a:lstStyle/>
+            <a:p/>
+          </p:txBody>
+        </p:sp>
+        <p:sp>
+          <p:nvSpPr>
+            <p:cNvPr id="973" name="pl973"/>
+            <p:cNvSpPr/>
+            <p:nvPr/>
+          </p:nvSpPr>
+          <p:spPr>
+            <a:xfrm>
+              <a:off x="1985667" y="3161211"/>
+              <a:ext cx="6631543" cy="1674709"/>
+            </a:xfrm>
+            <a:custGeom>
+              <a:avLst/>
+              <a:pathLst>
+                <a:path w="6631543" h="1674709">
+                  <a:moveTo>
+                    <a:pt x="0" y="1674709"/>
+                  </a:moveTo>
+                  <a:lnTo>
+                    <a:pt x="100748" y="1649266"/>
+                  </a:lnTo>
+                  <a:lnTo>
+                    <a:pt x="201497" y="1623823"/>
+                  </a:lnTo>
+                  <a:lnTo>
+                    <a:pt x="302245" y="1598381"/>
+                  </a:lnTo>
+                  <a:lnTo>
+                    <a:pt x="402994" y="1572938"/>
+                  </a:lnTo>
+                  <a:lnTo>
+                    <a:pt x="503742" y="1547495"/>
+                  </a:lnTo>
+                  <a:lnTo>
+                    <a:pt x="604491" y="1522053"/>
+                  </a:lnTo>
+                  <a:lnTo>
+                    <a:pt x="705239" y="1496610"/>
+                  </a:lnTo>
+                  <a:lnTo>
+                    <a:pt x="805988" y="1471167"/>
+                  </a:lnTo>
+                  <a:lnTo>
+                    <a:pt x="906737" y="1445724"/>
+                  </a:lnTo>
+                  <a:lnTo>
+                    <a:pt x="1007485" y="1420282"/>
+                  </a:lnTo>
+                  <a:lnTo>
+                    <a:pt x="1108234" y="1394839"/>
+                  </a:lnTo>
+                  <a:lnTo>
+                    <a:pt x="1208982" y="1369396"/>
+                  </a:lnTo>
+                  <a:lnTo>
+                    <a:pt x="1309731" y="1343953"/>
+                  </a:lnTo>
+                  <a:lnTo>
+                    <a:pt x="1410479" y="1318511"/>
+                  </a:lnTo>
+                  <a:lnTo>
+                    <a:pt x="1511228" y="1293068"/>
+                  </a:lnTo>
+                  <a:lnTo>
+                    <a:pt x="1611976" y="1267625"/>
+                  </a:lnTo>
+                  <a:lnTo>
+                    <a:pt x="1712725" y="1242183"/>
+                  </a:lnTo>
+                  <a:lnTo>
+                    <a:pt x="1813474" y="1216740"/>
+                  </a:lnTo>
+                  <a:lnTo>
+                    <a:pt x="1914222" y="1191297"/>
+                  </a:lnTo>
+                  <a:lnTo>
+                    <a:pt x="2014971" y="1165854"/>
+                  </a:lnTo>
+                  <a:lnTo>
+                    <a:pt x="2115719" y="1140412"/>
+                  </a:lnTo>
+                  <a:lnTo>
+                    <a:pt x="2216468" y="1114969"/>
+                  </a:lnTo>
+                  <a:lnTo>
+                    <a:pt x="2317216" y="1089526"/>
+                  </a:lnTo>
+                  <a:lnTo>
+                    <a:pt x="2417965" y="1064083"/>
+                  </a:lnTo>
+                  <a:lnTo>
+                    <a:pt x="2518714" y="1038641"/>
+                  </a:lnTo>
+                  <a:lnTo>
+                    <a:pt x="2619462" y="1013198"/>
+                  </a:lnTo>
+                  <a:lnTo>
+                    <a:pt x="2720211" y="987755"/>
+                  </a:lnTo>
+                  <a:lnTo>
+                    <a:pt x="2820959" y="962313"/>
+                  </a:lnTo>
+                  <a:lnTo>
+                    <a:pt x="2921708" y="936870"/>
+                  </a:lnTo>
+                  <a:lnTo>
+                    <a:pt x="3022456" y="911427"/>
+                  </a:lnTo>
+                  <a:lnTo>
+                    <a:pt x="3123205" y="885984"/>
+                  </a:lnTo>
+                  <a:lnTo>
+                    <a:pt x="3223953" y="860542"/>
+                  </a:lnTo>
+                  <a:lnTo>
+                    <a:pt x="3324702" y="835099"/>
+                  </a:lnTo>
+                  <a:lnTo>
+                    <a:pt x="3425451" y="809656"/>
+                  </a:lnTo>
+                  <a:lnTo>
+                    <a:pt x="3526199" y="784213"/>
+                  </a:lnTo>
+                  <a:lnTo>
+                    <a:pt x="3626948" y="758771"/>
+                  </a:lnTo>
+                  <a:lnTo>
+                    <a:pt x="3727696" y="733328"/>
+                  </a:lnTo>
+                  <a:lnTo>
+                    <a:pt x="3828445" y="707885"/>
+                  </a:lnTo>
+                  <a:lnTo>
+                    <a:pt x="3929193" y="682442"/>
+                  </a:lnTo>
+                  <a:lnTo>
+                    <a:pt x="4029942" y="657000"/>
+                  </a:lnTo>
+                  <a:lnTo>
+                    <a:pt x="4130691" y="631557"/>
+                  </a:lnTo>
+                  <a:lnTo>
+                    <a:pt x="4231439" y="606114"/>
+                  </a:lnTo>
+                  <a:lnTo>
+                    <a:pt x="4332188" y="580672"/>
+                  </a:lnTo>
+                  <a:lnTo>
+                    <a:pt x="4432936" y="555229"/>
+                  </a:lnTo>
+                  <a:lnTo>
+                    <a:pt x="4533685" y="529786"/>
+                  </a:lnTo>
+                  <a:lnTo>
+                    <a:pt x="4634433" y="504343"/>
+                  </a:lnTo>
+                  <a:lnTo>
+                    <a:pt x="4735182" y="478901"/>
+                  </a:lnTo>
+                  <a:lnTo>
+                    <a:pt x="4835930" y="453458"/>
+                  </a:lnTo>
+                  <a:lnTo>
+                    <a:pt x="4936679" y="428015"/>
+                  </a:lnTo>
+                  <a:lnTo>
+                    <a:pt x="5037428" y="402572"/>
+                  </a:lnTo>
+                  <a:lnTo>
+                    <a:pt x="5138176" y="377130"/>
+                  </a:lnTo>
+                  <a:lnTo>
+                    <a:pt x="5238925" y="351687"/>
+                  </a:lnTo>
+                  <a:lnTo>
+                    <a:pt x="5339673" y="326244"/>
+                  </a:lnTo>
+                  <a:lnTo>
+                    <a:pt x="5440422" y="300802"/>
+                  </a:lnTo>
+                  <a:lnTo>
+                    <a:pt x="5541170" y="275359"/>
+                  </a:lnTo>
+                  <a:lnTo>
+                    <a:pt x="5641919" y="249916"/>
+                  </a:lnTo>
+                  <a:lnTo>
+                    <a:pt x="5742668" y="224473"/>
+                  </a:lnTo>
+                  <a:lnTo>
+                    <a:pt x="5843416" y="199031"/>
+                  </a:lnTo>
+                  <a:lnTo>
+                    <a:pt x="5944165" y="173588"/>
+                  </a:lnTo>
+                  <a:lnTo>
+                    <a:pt x="6044913" y="148145"/>
+                  </a:lnTo>
+                  <a:lnTo>
+                    <a:pt x="6145662" y="122702"/>
+                  </a:lnTo>
+                  <a:lnTo>
+                    <a:pt x="6246410" y="97260"/>
+                  </a:lnTo>
+                  <a:lnTo>
+                    <a:pt x="6347159" y="71817"/>
+                  </a:lnTo>
+                  <a:lnTo>
+                    <a:pt x="6447907" y="46374"/>
+                  </a:lnTo>
+                  <a:lnTo>
+                    <a:pt x="6548656" y="20932"/>
+                  </a:lnTo>
+                  <a:lnTo>
+                    <a:pt x="6631543" y="0"/>
+                  </a:lnTo>
+                </a:path>
+              </a:pathLst>
+            </a:custGeom>
+            <a:ln w="27101" cap="flat">
+              <a:solidFill>
+                <a:srgbClr val="999999">
+                  <a:alpha val="100000"/>
+                </a:srgbClr>
+              </a:solidFill>
+              <a:prstDash val="solid"/>
+              <a:round/>
+            </a:ln>
+          </p:spPr>
+          <p:txBody>
+            <a:bodyPr/>
+            <a:lstStyle/>
+            <a:p/>
+          </p:txBody>
+        </p:sp>
+        <p:sp>
+          <p:nvSpPr>
+            <p:cNvPr id="974" name="tx974"/>
             <p:cNvSpPr/>
             <p:nvPr/>
           </p:nvSpPr>
@@ -36130,7 +37995,7 @@
         </p:sp>
         <p:sp>
           <p:nvSpPr>
-            <p:cNvPr id="967" name="tx967"/>
+            <p:cNvPr id="975" name="tx975"/>
             <p:cNvSpPr/>
             <p:nvPr/>
           </p:nvSpPr>
@@ -36176,7 +38041,7 @@
         </p:sp>
         <p:sp>
           <p:nvSpPr>
-            <p:cNvPr id="968" name="tx968"/>
+            <p:cNvPr id="976" name="tx976"/>
             <p:cNvSpPr/>
             <p:nvPr/>
           </p:nvSpPr>
@@ -36222,7 +38087,7 @@
         </p:sp>
         <p:sp>
           <p:nvSpPr>
-            <p:cNvPr id="969" name="tx969"/>
+            <p:cNvPr id="977" name="tx977"/>
             <p:cNvSpPr/>
             <p:nvPr/>
           </p:nvSpPr>
@@ -36268,7 +38133,7 @@
         </p:sp>
         <p:sp>
           <p:nvSpPr>
-            <p:cNvPr id="970" name="tx970"/>
+            <p:cNvPr id="978" name="tx978"/>
             <p:cNvSpPr/>
             <p:nvPr/>
           </p:nvSpPr>
@@ -36314,7 +38179,7 @@
         </p:sp>
         <p:sp>
           <p:nvSpPr>
-            <p:cNvPr id="971" name="tx971"/>
+            <p:cNvPr id="979" name="tx979"/>
             <p:cNvSpPr/>
             <p:nvPr/>
           </p:nvSpPr>
@@ -36360,7 +38225,7 @@
         </p:sp>
         <p:sp>
           <p:nvSpPr>
-            <p:cNvPr id="972" name="tx972"/>
+            <p:cNvPr id="980" name="tx980"/>
             <p:cNvSpPr/>
             <p:nvPr/>
           </p:nvSpPr>
@@ -36406,7 +38271,7 @@
         </p:sp>
         <p:sp>
           <p:nvSpPr>
-            <p:cNvPr id="973" name="tx973"/>
+            <p:cNvPr id="981" name="tx981"/>
             <p:cNvSpPr/>
             <p:nvPr/>
           </p:nvSpPr>
@@ -36452,7 +38317,7 @@
         </p:sp>
         <p:sp>
           <p:nvSpPr>
-            <p:cNvPr id="974" name="tx974"/>
+            <p:cNvPr id="982" name="tx982"/>
             <p:cNvSpPr/>
             <p:nvPr/>
           </p:nvSpPr>
@@ -36498,7 +38363,7 @@
         </p:sp>
         <p:sp>
           <p:nvSpPr>
-            <p:cNvPr id="975" name="tx975"/>
+            <p:cNvPr id="983" name="tx983"/>
             <p:cNvSpPr/>
             <p:nvPr/>
           </p:nvSpPr>
@@ -36544,7 +38409,7 @@
         </p:sp>
         <p:sp>
           <p:nvSpPr>
-            <p:cNvPr id="976" name="tx976"/>
+            <p:cNvPr id="984" name="tx984"/>
             <p:cNvSpPr/>
             <p:nvPr/>
           </p:nvSpPr>
@@ -36590,7 +38455,7 @@
         </p:sp>
         <p:sp>
           <p:nvSpPr>
-            <p:cNvPr id="977" name="tx977"/>
+            <p:cNvPr id="985" name="tx985"/>
             <p:cNvSpPr/>
             <p:nvPr/>
           </p:nvSpPr>
@@ -36636,7 +38501,7 @@
         </p:sp>
         <p:sp>
           <p:nvSpPr>
-            <p:cNvPr id="978" name="pt978"/>
+            <p:cNvPr id="986" name="pt986"/>
             <p:cNvSpPr/>
             <p:nvPr/>
           </p:nvSpPr>
@@ -36671,7 +38536,73 @@
         </p:sp>
         <p:sp>
           <p:nvSpPr>
-            <p:cNvPr id="979" name="pt979"/>
+            <p:cNvPr id="987" name="rc987"/>
+            <p:cNvSpPr/>
+            <p:nvPr/>
+          </p:nvSpPr>
+          <p:spPr>
+            <a:xfrm>
+              <a:off x="4148282" y="1966152"/>
+              <a:ext cx="219455" cy="219456"/>
+            </a:xfrm>
+            <a:prstGeom prst="rect">
+              <a:avLst/>
+            </a:prstGeom>
+            <a:solidFill>
+              <a:srgbClr val="999999">
+                <a:alpha val="14901"/>
+              </a:srgbClr>
+            </a:solidFill>
+          </p:spPr>
+          <p:txBody>
+            <a:bodyPr/>
+            <a:lstStyle/>
+            <a:p/>
+          </p:txBody>
+        </p:sp>
+        <p:sp>
+          <p:nvSpPr>
+            <p:cNvPr id="988" name="pl988"/>
+            <p:cNvSpPr/>
+            <p:nvPr/>
+          </p:nvSpPr>
+          <p:spPr>
+            <a:xfrm>
+              <a:off x="4170228" y="2075880"/>
+              <a:ext cx="175564" cy="0"/>
+            </a:xfrm>
+            <a:custGeom>
+              <a:avLst/>
+              <a:pathLst>
+                <a:path w="175564" h="0">
+                  <a:moveTo>
+                    <a:pt x="0" y="0"/>
+                  </a:moveTo>
+                  <a:lnTo>
+                    <a:pt x="175564" y="0"/>
+                  </a:lnTo>
+                </a:path>
+              </a:pathLst>
+            </a:custGeom>
+            <a:ln w="27101" cap="flat">
+              <a:solidFill>
+                <a:srgbClr val="E31A1C">
+                  <a:alpha val="100000"/>
+                </a:srgbClr>
+              </a:solidFill>
+              <a:prstDash val="solid"/>
+              <a:round/>
+            </a:ln>
+          </p:spPr>
+          <p:txBody>
+            <a:bodyPr/>
+            <a:lstStyle/>
+            <a:p/>
+          </p:txBody>
+        </p:sp>
+        <p:sp>
+          <p:nvSpPr>
+            <p:cNvPr id="989" name="pt989"/>
             <p:cNvSpPr/>
             <p:nvPr/>
           </p:nvSpPr>
@@ -36706,7 +38637,73 @@
         </p:sp>
         <p:sp>
           <p:nvSpPr>
-            <p:cNvPr id="980" name="tx980"/>
+            <p:cNvPr id="990" name="rc990"/>
+            <p:cNvSpPr/>
+            <p:nvPr/>
+          </p:nvSpPr>
+          <p:spPr>
+            <a:xfrm>
+              <a:off x="4879534" y="1966152"/>
+              <a:ext cx="219455" cy="219456"/>
+            </a:xfrm>
+            <a:prstGeom prst="rect">
+              <a:avLst/>
+            </a:prstGeom>
+            <a:solidFill>
+              <a:srgbClr val="999999">
+                <a:alpha val="14901"/>
+              </a:srgbClr>
+            </a:solidFill>
+          </p:spPr>
+          <p:txBody>
+            <a:bodyPr/>
+            <a:lstStyle/>
+            <a:p/>
+          </p:txBody>
+        </p:sp>
+        <p:sp>
+          <p:nvSpPr>
+            <p:cNvPr id="991" name="pl991"/>
+            <p:cNvSpPr/>
+            <p:nvPr/>
+          </p:nvSpPr>
+          <p:spPr>
+            <a:xfrm>
+              <a:off x="4901480" y="2075880"/>
+              <a:ext cx="175564" cy="0"/>
+            </a:xfrm>
+            <a:custGeom>
+              <a:avLst/>
+              <a:pathLst>
+                <a:path w="175564" h="0">
+                  <a:moveTo>
+                    <a:pt x="0" y="0"/>
+                  </a:moveTo>
+                  <a:lnTo>
+                    <a:pt x="175564" y="0"/>
+                  </a:lnTo>
+                </a:path>
+              </a:pathLst>
+            </a:custGeom>
+            <a:ln w="27101" cap="flat">
+              <a:solidFill>
+                <a:srgbClr val="999999">
+                  <a:alpha val="100000"/>
+                </a:srgbClr>
+              </a:solidFill>
+              <a:prstDash val="solid"/>
+              <a:round/>
+            </a:ln>
+          </p:spPr>
+          <p:txBody>
+            <a:bodyPr/>
+            <a:lstStyle/>
+            <a:p/>
+          </p:txBody>
+        </p:sp>
+        <p:sp>
+          <p:nvSpPr>
+            <p:cNvPr id="992" name="tx992"/>
             <p:cNvSpPr/>
             <p:nvPr/>
           </p:nvSpPr>
@@ -36752,7 +38749,7 @@
         </p:sp>
         <p:sp>
           <p:nvSpPr>
-            <p:cNvPr id="981" name="tx981"/>
+            <p:cNvPr id="993" name="tx993"/>
             <p:cNvSpPr/>
             <p:nvPr/>
           </p:nvSpPr>
@@ -36798,7 +38795,7 @@
         </p:sp>
         <p:sp>
           <p:nvSpPr>
-            <p:cNvPr id="982" name="tx982"/>
+            <p:cNvPr id="994" name="tx994"/>
             <p:cNvSpPr/>
             <p:nvPr/>
           </p:nvSpPr>
